--- a/dialogue-datasets-ru.pptx
+++ b/dialogue-datasets-ru.pptx
@@ -5315,29 +5315,29 @@
         </p:nvSpPr>
         <p:spPr>
           <a:xfrm>
-            <a:off x="713231" y="5682996"/>
-            <a:ext cx="1060704" cy="210312"/>
-          </a:xfrm>
-          <a:prstGeom prst="rect">
-            <a:avLst/>
-          </a:prstGeom>
-          <a:noFill/>
-        </p:spPr>
-        <p:txBody>
-          <a:bodyPr wrap="square" lIns="0" rIns="0" tIns="0" bIns="0" anchor="t">
-            <a:spAutoFit/>
+            <a:off x="713231" y="5641848"/>
+            <a:ext cx="1060704" cy="310896"/>
+          </a:xfrm>
+          <a:prstGeom prst="rect">
+            <a:avLst/>
+          </a:prstGeom>
+          <a:noFill/>
+        </p:spPr>
+        <p:txBody>
+          <a:bodyPr wrap="square" lIns="0" rIns="0" tIns="0" bIns="0" anchor="ctr">
+            <a:noAutofit/>
           </a:bodyPr>
           <a:lstStyle/>
           <a:p>
             <a:pPr algn="ctr">
               <a:lnSpc>
-                <a:spcPct val="108000"/>
-              </a:lnSpc>
-              <a:spcBef>
-                <a:spcPts val="0"/>
-              </a:spcBef>
-              <a:spcAft>
-                <a:spcPts val="200"/>
+                <a:spcPct val="100000"/>
+              </a:lnSpc>
+              <a:spcBef>
+                <a:spcPts val="0"/>
+              </a:spcBef>
+              <a:spcAft>
+                <a:spcPts val="0"/>
               </a:spcAft>
               <a:defRPr sz="1050" b="1">
                 <a:solidFill>
@@ -5405,29 +5405,29 @@
         </p:nvSpPr>
         <p:spPr>
           <a:xfrm>
-            <a:off x="2075688" y="5682996"/>
-            <a:ext cx="1060704" cy="210312"/>
-          </a:xfrm>
-          <a:prstGeom prst="rect">
-            <a:avLst/>
-          </a:prstGeom>
-          <a:noFill/>
-        </p:spPr>
-        <p:txBody>
-          <a:bodyPr wrap="square" lIns="0" rIns="0" tIns="0" bIns="0" anchor="t">
-            <a:spAutoFit/>
+            <a:off x="2075688" y="5641848"/>
+            <a:ext cx="1060704" cy="310896"/>
+          </a:xfrm>
+          <a:prstGeom prst="rect">
+            <a:avLst/>
+          </a:prstGeom>
+          <a:noFill/>
+        </p:spPr>
+        <p:txBody>
+          <a:bodyPr wrap="square" lIns="0" rIns="0" tIns="0" bIns="0" anchor="ctr">
+            <a:noAutofit/>
           </a:bodyPr>
           <a:lstStyle/>
           <a:p>
             <a:pPr algn="ctr">
               <a:lnSpc>
-                <a:spcPct val="108000"/>
-              </a:lnSpc>
-              <a:spcBef>
-                <a:spcPts val="0"/>
-              </a:spcBef>
-              <a:spcAft>
-                <a:spcPts val="200"/>
+                <a:spcPct val="100000"/>
+              </a:lnSpc>
+              <a:spcBef>
+                <a:spcPts val="0"/>
+              </a:spcBef>
+              <a:spcAft>
+                <a:spcPts val="0"/>
               </a:spcAft>
               <a:defRPr sz="1050" b="1">
                 <a:solidFill>
@@ -5495,29 +5495,29 @@
         </p:nvSpPr>
         <p:spPr>
           <a:xfrm>
-            <a:off x="3438144" y="5682996"/>
-            <a:ext cx="1490472" cy="210312"/>
-          </a:xfrm>
-          <a:prstGeom prst="rect">
-            <a:avLst/>
-          </a:prstGeom>
-          <a:noFill/>
-        </p:spPr>
-        <p:txBody>
-          <a:bodyPr wrap="square" lIns="0" rIns="0" tIns="0" bIns="0" anchor="t">
-            <a:spAutoFit/>
+            <a:off x="3438144" y="5641848"/>
+            <a:ext cx="1490472" cy="310896"/>
+          </a:xfrm>
+          <a:prstGeom prst="rect">
+            <a:avLst/>
+          </a:prstGeom>
+          <a:noFill/>
+        </p:spPr>
+        <p:txBody>
+          <a:bodyPr wrap="square" lIns="0" rIns="0" tIns="0" bIns="0" anchor="ctr">
+            <a:noAutofit/>
           </a:bodyPr>
           <a:lstStyle/>
           <a:p>
             <a:pPr algn="ctr">
               <a:lnSpc>
-                <a:spcPct val="108000"/>
-              </a:lnSpc>
-              <a:spcBef>
-                <a:spcPts val="0"/>
-              </a:spcBef>
-              <a:spcAft>
-                <a:spcPts val="200"/>
+                <a:spcPct val="100000"/>
+              </a:lnSpc>
+              <a:spcBef>
+                <a:spcPts val="0"/>
+              </a:spcBef>
+              <a:spcAft>
+                <a:spcPts val="0"/>
               </a:spcAft>
               <a:defRPr sz="1050" b="1">
                 <a:solidFill>
@@ -5898,29 +5898,29 @@
         </p:nvSpPr>
         <p:spPr>
           <a:xfrm>
-            <a:off x="8558784" y="4402836"/>
-            <a:ext cx="1545336" cy="210312"/>
-          </a:xfrm>
-          <a:prstGeom prst="rect">
-            <a:avLst/>
-          </a:prstGeom>
-          <a:noFill/>
-        </p:spPr>
-        <p:txBody>
-          <a:bodyPr wrap="square" lIns="0" rIns="0" tIns="0" bIns="0" anchor="t">
-            <a:spAutoFit/>
+            <a:off x="8558784" y="4361688"/>
+            <a:ext cx="1545336" cy="310896"/>
+          </a:xfrm>
+          <a:prstGeom prst="rect">
+            <a:avLst/>
+          </a:prstGeom>
+          <a:noFill/>
+        </p:spPr>
+        <p:txBody>
+          <a:bodyPr wrap="square" lIns="0" rIns="0" tIns="0" bIns="0" anchor="ctr">
+            <a:noAutofit/>
           </a:bodyPr>
           <a:lstStyle/>
           <a:p>
             <a:pPr algn="ctr">
               <a:lnSpc>
-                <a:spcPct val="108000"/>
-              </a:lnSpc>
-              <a:spcBef>
-                <a:spcPts val="0"/>
-              </a:spcBef>
-              <a:spcAft>
-                <a:spcPts val="200"/>
+                <a:spcPct val="100000"/>
+              </a:lnSpc>
+              <a:spcBef>
+                <a:spcPts val="0"/>
+              </a:spcBef>
+              <a:spcAft>
+                <a:spcPts val="0"/>
               </a:spcAft>
               <a:defRPr sz="1050" b="1">
                 <a:solidFill>
@@ -12759,29 +12759,29 @@
         </p:nvSpPr>
         <p:spPr>
           <a:xfrm>
-            <a:off x="886968" y="5198364"/>
-            <a:ext cx="1161288" cy="210312"/>
-          </a:xfrm>
-          <a:prstGeom prst="rect">
-            <a:avLst/>
-          </a:prstGeom>
-          <a:noFill/>
-        </p:spPr>
-        <p:txBody>
-          <a:bodyPr wrap="square" lIns="0" rIns="0" tIns="0" bIns="0" anchor="t">
-            <a:spAutoFit/>
+            <a:off x="886968" y="5157216"/>
+            <a:ext cx="1161288" cy="310896"/>
+          </a:xfrm>
+          <a:prstGeom prst="rect">
+            <a:avLst/>
+          </a:prstGeom>
+          <a:noFill/>
+        </p:spPr>
+        <p:txBody>
+          <a:bodyPr wrap="square" lIns="0" rIns="0" tIns="0" bIns="0" anchor="ctr">
+            <a:noAutofit/>
           </a:bodyPr>
           <a:lstStyle/>
           <a:p>
             <a:pPr algn="ctr">
               <a:lnSpc>
-                <a:spcPct val="108000"/>
-              </a:lnSpc>
-              <a:spcBef>
-                <a:spcPts val="0"/>
-              </a:spcBef>
-              <a:spcAft>
-                <a:spcPts val="200"/>
+                <a:spcPct val="100000"/>
+              </a:lnSpc>
+              <a:spcBef>
+                <a:spcPts val="0"/>
+              </a:spcBef>
+              <a:spcAft>
+                <a:spcPts val="0"/>
               </a:spcAft>
               <a:defRPr sz="1050" b="1">
                 <a:solidFill>
@@ -13075,29 +13075,29 @@
         </p:nvSpPr>
         <p:spPr>
           <a:xfrm>
-            <a:off x="4645152" y="5198364"/>
-            <a:ext cx="1161288" cy="210312"/>
-          </a:xfrm>
-          <a:prstGeom prst="rect">
-            <a:avLst/>
-          </a:prstGeom>
-          <a:noFill/>
-        </p:spPr>
-        <p:txBody>
-          <a:bodyPr wrap="square" lIns="0" rIns="0" tIns="0" bIns="0" anchor="t">
-            <a:spAutoFit/>
+            <a:off x="4645152" y="5157216"/>
+            <a:ext cx="1161288" cy="310896"/>
+          </a:xfrm>
+          <a:prstGeom prst="rect">
+            <a:avLst/>
+          </a:prstGeom>
+          <a:noFill/>
+        </p:spPr>
+        <p:txBody>
+          <a:bodyPr wrap="square" lIns="0" rIns="0" tIns="0" bIns="0" anchor="ctr">
+            <a:noAutofit/>
           </a:bodyPr>
           <a:lstStyle/>
           <a:p>
             <a:pPr algn="ctr">
               <a:lnSpc>
-                <a:spcPct val="108000"/>
-              </a:lnSpc>
-              <a:spcBef>
-                <a:spcPts val="0"/>
-              </a:spcBef>
-              <a:spcAft>
-                <a:spcPts val="200"/>
+                <a:spcPct val="100000"/>
+              </a:lnSpc>
+              <a:spcBef>
+                <a:spcPts val="0"/>
+              </a:spcBef>
+              <a:spcAft>
+                <a:spcPts val="0"/>
               </a:spcAft>
               <a:defRPr sz="1050" b="1">
                 <a:solidFill>
@@ -13391,29 +13391,29 @@
         </p:nvSpPr>
         <p:spPr>
           <a:xfrm>
-            <a:off x="8403336" y="5198364"/>
-            <a:ext cx="1161288" cy="210312"/>
-          </a:xfrm>
-          <a:prstGeom prst="rect">
-            <a:avLst/>
-          </a:prstGeom>
-          <a:noFill/>
-        </p:spPr>
-        <p:txBody>
-          <a:bodyPr wrap="square" lIns="0" rIns="0" tIns="0" bIns="0" anchor="t">
-            <a:spAutoFit/>
+            <a:off x="8403336" y="5157216"/>
+            <a:ext cx="1161288" cy="310896"/>
+          </a:xfrm>
+          <a:prstGeom prst="rect">
+            <a:avLst/>
+          </a:prstGeom>
+          <a:noFill/>
+        </p:spPr>
+        <p:txBody>
+          <a:bodyPr wrap="square" lIns="0" rIns="0" tIns="0" bIns="0" anchor="ctr">
+            <a:noAutofit/>
           </a:bodyPr>
           <a:lstStyle/>
           <a:p>
             <a:pPr algn="ctr">
               <a:lnSpc>
-                <a:spcPct val="108000"/>
-              </a:lnSpc>
-              <a:spcBef>
-                <a:spcPts val="0"/>
-              </a:spcBef>
-              <a:spcAft>
-                <a:spcPts val="200"/>
+                <a:spcPct val="100000"/>
+              </a:lnSpc>
+              <a:spcBef>
+                <a:spcPts val="0"/>
+              </a:spcBef>
+              <a:spcAft>
+                <a:spcPts val="0"/>
               </a:spcAft>
               <a:defRPr sz="1050" b="1">
                 <a:solidFill>
